--- a/docs/RUBATO_화면설계서.pptx
+++ b/docs/RUBATO_화면설계서.pptx
@@ -5531,7 +5531,7 @@
                 <a:latin typeface="+mj-ea"/>
                 <a:ea typeface="+mj-ea"/>
               </a:rPr>
-              <a:t>2020100300</a:t>
+              <a:t/>
             </a:r>
             <a:r>
               <a:rPr lang="ko-KR" altLang="en-US" sz="2400" dirty="0">
@@ -5545,7 +5545,7 @@
                 <a:latin typeface="+mj-ea"/>
                 <a:ea typeface="+mj-ea"/>
               </a:rPr>
-              <a:t>, 2020100307</a:t>
+              <a:t>, </a:t>
             </a:r>
             <a:r>
               <a:rPr lang="ko-KR" altLang="en-US" sz="2400" dirty="0" err="1">
@@ -5559,7 +5559,7 @@
                 <a:latin typeface="+mj-ea"/>
                 <a:ea typeface="+mj-ea"/>
               </a:rPr>
-              <a:t>, 2020100267</a:t>
+              <a:t>, </a:t>
             </a:r>
             <a:r>
               <a:rPr lang="ko-KR" altLang="en-US" sz="2400" dirty="0" err="1">
@@ -5579,7 +5579,7 @@
                 <a:latin typeface="+mj-ea"/>
                 <a:ea typeface="+mj-ea"/>
               </a:rPr>
-              <a:t>2020100018</a:t>
+              <a:t/>
             </a:r>
             <a:r>
               <a:rPr lang="ko-KR" altLang="en-US" sz="2400" dirty="0">
@@ -5593,7 +5593,7 @@
                 <a:latin typeface="+mj-ea"/>
                 <a:ea typeface="+mj-ea"/>
               </a:rPr>
-              <a:t>, 2019100141</a:t>
+              <a:t>, </a:t>
             </a:r>
             <a:r>
               <a:rPr lang="ko-KR" altLang="en-US" sz="2400" dirty="0">
